--- a/Here I am to Worship-CH.pptx
+++ b/Here I am to Worship-CH.pptx
@@ -12,9 +12,9 @@
     <p:sldId id="284" r:id="rId3"/>
     <p:sldId id="276" r:id="rId4"/>
     <p:sldId id="285" r:id="rId5"/>
-    <p:sldId id="286" r:id="rId6"/>
+    <p:sldId id="289" r:id="rId6"/>
     <p:sldId id="287" r:id="rId7"/>
-    <p:sldId id="288" r:id="rId8"/>
+    <p:sldId id="290" r:id="rId8"/>
   </p:sldIdLst>
   <p:sldSz cx="12192000" cy="6858000"/>
   <p:notesSz cx="6858000" cy="9144000"/>
@@ -4270,7 +4270,7 @@
                 <a:latin typeface="Avenir Medium" panose="02000503020000020003" pitchFamily="2" charset="0"/>
                 <a:ea typeface="Bodoni Ornaments" pitchFamily="2" charset="0"/>
               </a:rPr>
-              <a:t> D                 A                             Em</a:t>
+              <a:t> G                 D                             Am</a:t>
             </a:r>
           </a:p>
           <a:p>
@@ -4296,7 +4296,7 @@
                 <a:latin typeface="Avenir Medium" panose="02000503020000020003" pitchFamily="2" charset="0"/>
                 <a:ea typeface="Bodoni Ornaments" pitchFamily="2" charset="0"/>
               </a:rPr>
-              <a:t>D                  A                G</a:t>
+              <a:t>G                  D                C</a:t>
             </a:r>
           </a:p>
           <a:p>
@@ -4322,7 +4322,7 @@
                 <a:latin typeface="Avenir Medium" panose="02000503020000020003" pitchFamily="2" charset="0"/>
                 <a:ea typeface="Bodoni Ornaments" pitchFamily="2" charset="0"/>
               </a:rPr>
-              <a:t>  D               A              Em</a:t>
+              <a:t>  G               D              Am</a:t>
             </a:r>
           </a:p>
           <a:p>
@@ -4348,7 +4348,7 @@
                 <a:latin typeface="Avenir Medium" panose="02000503020000020003" pitchFamily="2" charset="0"/>
                 <a:ea typeface="Bodoni Ornaments" pitchFamily="2" charset="0"/>
               </a:rPr>
-              <a:t>  D            A                     G         </a:t>
+              <a:t>  G            D                     C         </a:t>
             </a:r>
           </a:p>
           <a:p>
@@ -4462,7 +4462,7 @@
                 <a:latin typeface="Avenir Medium" panose="02000503020000020003" pitchFamily="2" charset="0"/>
                 <a:ea typeface="Bodoni Ornaments" pitchFamily="2" charset="0"/>
               </a:rPr>
-              <a:t>                     D                                 A </a:t>
+              <a:t>                     G                                 D </a:t>
             </a:r>
           </a:p>
           <a:p>
@@ -4488,7 +4488,7 @@
                 <a:latin typeface="Avenir Medium" panose="02000503020000020003" pitchFamily="2" charset="0"/>
                 <a:ea typeface="Bodoni Ornaments" pitchFamily="2" charset="0"/>
               </a:rPr>
-              <a:t>                     D                            G</a:t>
+              <a:t>                     G                            C</a:t>
             </a:r>
           </a:p>
           <a:p>
@@ -4514,7 +4514,7 @@
                 <a:latin typeface="Avenir Medium" panose="02000503020000020003" pitchFamily="2" charset="0"/>
                 <a:ea typeface="Bodoni Ornaments" pitchFamily="2" charset="0"/>
               </a:rPr>
-              <a:t>                                     D                          A</a:t>
+              <a:t>                              G                          D</a:t>
             </a:r>
           </a:p>
           <a:p>
@@ -4527,7 +4527,7 @@
                 <a:latin typeface="Avenir Medium" panose="02000503020000020003" pitchFamily="2" charset="0"/>
                 <a:ea typeface="Bodoni Ornaments" pitchFamily="2" charset="0"/>
               </a:rPr>
-              <a:t>And you're altogether lovely Altogether worthy</a:t>
+              <a:t>You're altogether lovely Altogether worthy</a:t>
             </a:r>
           </a:p>
           <a:p>
@@ -4540,7 +4540,7 @@
                 <a:latin typeface="Avenir Medium" panose="02000503020000020003" pitchFamily="2" charset="0"/>
                 <a:ea typeface="Bodoni Ornaments" pitchFamily="2" charset="0"/>
               </a:rPr>
-              <a:t>                  D                    G</a:t>
+              <a:t>                  G                    C</a:t>
             </a:r>
           </a:p>
           <a:p>
@@ -4652,7 +4652,7 @@
                 <a:latin typeface="Avenir Medium" panose="02000503020000020003" pitchFamily="2" charset="0"/>
                 <a:ea typeface="Bodoni Ornaments" pitchFamily="2" charset="0"/>
               </a:rPr>
-              <a:t>D               A                Em</a:t>
+              <a:t>G               D                Am</a:t>
             </a:r>
           </a:p>
           <a:p>
@@ -4678,7 +4678,7 @@
                 <a:latin typeface="Avenir Medium" panose="02000503020000020003" pitchFamily="2" charset="0"/>
                 <a:ea typeface="Bodoni Ornaments" pitchFamily="2" charset="0"/>
               </a:rPr>
-              <a:t> D               A          G</a:t>
+              <a:t> G               D          C</a:t>
             </a:r>
           </a:p>
           <a:p>
@@ -4704,7 +4704,7 @@
                 <a:latin typeface="Avenir Medium" panose="02000503020000020003" pitchFamily="2" charset="0"/>
                 <a:ea typeface="Bodoni Ornaments" pitchFamily="2" charset="0"/>
               </a:rPr>
-              <a:t> D                 A                 Em</a:t>
+              <a:t> G                 D                 Am</a:t>
             </a:r>
           </a:p>
           <a:p>
@@ -4730,7 +4730,7 @@
                 <a:latin typeface="Avenir Medium" panose="02000503020000020003" pitchFamily="2" charset="0"/>
                 <a:ea typeface="Bodoni Ornaments" pitchFamily="2" charset="0"/>
               </a:rPr>
-              <a:t> D       A                              G         </a:t>
+              <a:t> G       D                              C         </a:t>
             </a:r>
           </a:p>
           <a:p>
@@ -4779,7 +4779,7 @@
         <p:cNvPr id="1" name="">
           <a:extLst>
             <a:ext uri="{FF2B5EF4-FFF2-40B4-BE49-F238E27FC236}">
-              <a16:creationId xmlns:a16="http://schemas.microsoft.com/office/drawing/2014/main" id="{CB643E6E-9210-0D93-C0AE-7D3F3C85EAE6}"/>
+              <a16:creationId xmlns:a16="http://schemas.microsoft.com/office/drawing/2014/main" id="{E719D002-FCA0-246E-16BA-0F489AE9E812}"/>
             </a:ext>
           </a:extLst>
         </p:cNvPr>
@@ -4799,7 +4799,7 @@
           <p:cNvPr id="3" name="Subtitle 2">
             <a:extLst>
               <a:ext uri="{FF2B5EF4-FFF2-40B4-BE49-F238E27FC236}">
-                <a16:creationId xmlns:a16="http://schemas.microsoft.com/office/drawing/2014/main" id="{3166FAC4-1AE5-F2B7-96B1-2BC84CCC2096}"/>
+                <a16:creationId xmlns:a16="http://schemas.microsoft.com/office/drawing/2014/main" id="{DF3BB9B5-6CA9-7169-DD30-3082D279EC2B}"/>
               </a:ext>
             </a:extLst>
           </p:cNvPr>
@@ -4812,8 +4812,8 @@
         </p:nvSpPr>
         <p:spPr>
           <a:xfrm>
-            <a:off x="222739" y="211015"/>
-            <a:ext cx="10472156" cy="6482862"/>
+            <a:off x="222738" y="211015"/>
+            <a:ext cx="11699631" cy="6482862"/>
           </a:xfrm>
         </p:spPr>
         <p:txBody>
@@ -4844,7 +4844,7 @@
                 <a:latin typeface="Avenir Medium" panose="02000503020000020003" pitchFamily="2" charset="0"/>
                 <a:ea typeface="Bodoni Ornaments" pitchFamily="2" charset="0"/>
               </a:rPr>
-              <a:t>                     D                                 A </a:t>
+              <a:t>                     G                                 D </a:t>
             </a:r>
           </a:p>
           <a:p>
@@ -4870,7 +4870,7 @@
                 <a:latin typeface="Avenir Medium" panose="02000503020000020003" pitchFamily="2" charset="0"/>
                 <a:ea typeface="Bodoni Ornaments" pitchFamily="2" charset="0"/>
               </a:rPr>
-              <a:t>                     D                            G</a:t>
+              <a:t>                     G                            C</a:t>
             </a:r>
           </a:p>
           <a:p>
@@ -4896,7 +4896,7 @@
                 <a:latin typeface="Avenir Medium" panose="02000503020000020003" pitchFamily="2" charset="0"/>
                 <a:ea typeface="Bodoni Ornaments" pitchFamily="2" charset="0"/>
               </a:rPr>
-              <a:t>                                     D                          A</a:t>
+              <a:t>                              G                          D</a:t>
             </a:r>
           </a:p>
           <a:p>
@@ -4909,7 +4909,7 @@
                 <a:latin typeface="Avenir Medium" panose="02000503020000020003" pitchFamily="2" charset="0"/>
                 <a:ea typeface="Bodoni Ornaments" pitchFamily="2" charset="0"/>
               </a:rPr>
-              <a:t>And you're altogether lovely Altogether worthy</a:t>
+              <a:t>You're altogether lovely Altogether worthy</a:t>
             </a:r>
           </a:p>
           <a:p>
@@ -4922,7 +4922,7 @@
                 <a:latin typeface="Avenir Medium" panose="02000503020000020003" pitchFamily="2" charset="0"/>
                 <a:ea typeface="Bodoni Ornaments" pitchFamily="2" charset="0"/>
               </a:rPr>
-              <a:t>                  D                    G</a:t>
+              <a:t>                  G                    C</a:t>
             </a:r>
           </a:p>
           <a:p>
@@ -4945,7 +4945,7 @@
           <p:cNvPr id="2" name="TextBox 1">
             <a:extLst>
               <a:ext uri="{FF2B5EF4-FFF2-40B4-BE49-F238E27FC236}">
-                <a16:creationId xmlns:a16="http://schemas.microsoft.com/office/drawing/2014/main" id="{037A157C-0723-604D-B3D7-90E7CFB1BDAC}"/>
+                <a16:creationId xmlns:a16="http://schemas.microsoft.com/office/drawing/2014/main" id="{D731883E-42A4-5C3C-8C92-7247B4DFB3FD}"/>
               </a:ext>
             </a:extLst>
           </p:cNvPr>
@@ -4982,7 +4982,7 @@
     </p:spTree>
     <p:extLst>
       <p:ext uri="{BB962C8B-B14F-4D97-AF65-F5344CB8AC3E}">
-        <p14:creationId xmlns:p14="http://schemas.microsoft.com/office/powerpoint/2010/main" val="221088540"/>
+        <p14:creationId xmlns:p14="http://schemas.microsoft.com/office/powerpoint/2010/main" val="3064515698"/>
       </p:ext>
     </p:extLst>
   </p:cSld>
@@ -5083,7 +5083,7 @@
                 <a:latin typeface="Avenir Medium" panose="02000503020000020003" pitchFamily="2" charset="0"/>
                 <a:ea typeface="Bodoni Ornaments" pitchFamily="2" charset="0"/>
               </a:rPr>
-              <a:t>     A       D               G</a:t>
+              <a:t>     D       G               C</a:t>
             </a:r>
           </a:p>
           <a:p>
@@ -5109,8 +5109,25 @@
                 <a:latin typeface="Avenir Medium" panose="02000503020000020003" pitchFamily="2" charset="0"/>
                 <a:ea typeface="Bodoni Ornaments" pitchFamily="2" charset="0"/>
               </a:rPr>
-              <a:t>     A         D   G</a:t>
-            </a:r>
+              <a:t>     D         </a:t>
+            </a:r>
+            <a:r>
+              <a:rPr lang="en-US" sz="3600">
+                <a:solidFill>
+                  <a:srgbClr val="FFFF00"/>
+                </a:solidFill>
+                <a:latin typeface="Avenir Medium" panose="02000503020000020003" pitchFamily="2" charset="0"/>
+                <a:ea typeface="Bodoni Ornaments" pitchFamily="2" charset="0"/>
+              </a:rPr>
+              <a:t>G             C</a:t>
+            </a:r>
+            <a:endParaRPr lang="en-US" sz="3600" dirty="0">
+              <a:solidFill>
+                <a:srgbClr val="FFFF00"/>
+              </a:solidFill>
+              <a:latin typeface="Avenir Medium" panose="02000503020000020003" pitchFamily="2" charset="0"/>
+              <a:ea typeface="Bodoni Ornaments" pitchFamily="2" charset="0"/>
+            </a:endParaRPr>
           </a:p>
           <a:p>
             <a:pPr algn="l"/>
@@ -5197,7 +5214,7 @@
         <p:cNvPr id="1" name="">
           <a:extLst>
             <a:ext uri="{FF2B5EF4-FFF2-40B4-BE49-F238E27FC236}">
-              <a16:creationId xmlns:a16="http://schemas.microsoft.com/office/drawing/2014/main" id="{7DB329BF-095B-FA28-3FA8-950372EE1EF0}"/>
+              <a16:creationId xmlns:a16="http://schemas.microsoft.com/office/drawing/2014/main" id="{DDAB0709-CB67-06EF-FC21-14AED60C21AF}"/>
             </a:ext>
           </a:extLst>
         </p:cNvPr>
@@ -5217,7 +5234,7 @@
           <p:cNvPr id="3" name="Subtitle 2">
             <a:extLst>
               <a:ext uri="{FF2B5EF4-FFF2-40B4-BE49-F238E27FC236}">
-                <a16:creationId xmlns:a16="http://schemas.microsoft.com/office/drawing/2014/main" id="{BE2F92EA-9364-DF1F-A992-6778DFAF7F59}"/>
+                <a16:creationId xmlns:a16="http://schemas.microsoft.com/office/drawing/2014/main" id="{FA493994-0B02-2A10-3B3A-17F17953993C}"/>
               </a:ext>
             </a:extLst>
           </p:cNvPr>
@@ -5262,7 +5279,7 @@
                 <a:latin typeface="Avenir Medium" panose="02000503020000020003" pitchFamily="2" charset="0"/>
                 <a:ea typeface="Bodoni Ornaments" pitchFamily="2" charset="0"/>
               </a:rPr>
-              <a:t>                     D                                 A </a:t>
+              <a:t>                     G                                 D </a:t>
             </a:r>
           </a:p>
           <a:p>
@@ -5288,7 +5305,7 @@
                 <a:latin typeface="Avenir Medium" panose="02000503020000020003" pitchFamily="2" charset="0"/>
                 <a:ea typeface="Bodoni Ornaments" pitchFamily="2" charset="0"/>
               </a:rPr>
-              <a:t>                     D                            G</a:t>
+              <a:t>                     G                            C</a:t>
             </a:r>
           </a:p>
           <a:p>
@@ -5314,7 +5331,7 @@
                 <a:latin typeface="Avenir Medium" panose="02000503020000020003" pitchFamily="2" charset="0"/>
                 <a:ea typeface="Bodoni Ornaments" pitchFamily="2" charset="0"/>
               </a:rPr>
-              <a:t>                                     D                          A</a:t>
+              <a:t>                              G                          D</a:t>
             </a:r>
           </a:p>
           <a:p>
@@ -5327,7 +5344,7 @@
                 <a:latin typeface="Avenir Medium" panose="02000503020000020003" pitchFamily="2" charset="0"/>
                 <a:ea typeface="Bodoni Ornaments" pitchFamily="2" charset="0"/>
               </a:rPr>
-              <a:t>And you're altogether lovely Altogether worthy</a:t>
+              <a:t>You're altogether lovely Altogether worthy</a:t>
             </a:r>
           </a:p>
           <a:p>
@@ -5340,7 +5357,7 @@
                 <a:latin typeface="Avenir Medium" panose="02000503020000020003" pitchFamily="2" charset="0"/>
                 <a:ea typeface="Bodoni Ornaments" pitchFamily="2" charset="0"/>
               </a:rPr>
-              <a:t>                  D                    G</a:t>
+              <a:t>                  G                    C</a:t>
             </a:r>
           </a:p>
           <a:p>
@@ -5363,7 +5380,7 @@
           <p:cNvPr id="2" name="TextBox 1">
             <a:extLst>
               <a:ext uri="{FF2B5EF4-FFF2-40B4-BE49-F238E27FC236}">
-                <a16:creationId xmlns:a16="http://schemas.microsoft.com/office/drawing/2014/main" id="{930615E7-26A6-C468-7770-431E82D55DFC}"/>
+                <a16:creationId xmlns:a16="http://schemas.microsoft.com/office/drawing/2014/main" id="{0C1BCB16-F4E1-DD0C-F68F-C329E7FFFC3A}"/>
               </a:ext>
             </a:extLst>
           </p:cNvPr>
@@ -5372,8 +5389,8 @@
         </p:nvSpPr>
         <p:spPr>
           <a:xfrm>
-            <a:off x="9475694" y="6211669"/>
-            <a:ext cx="2568332" cy="646331"/>
+            <a:off x="9532169" y="6211669"/>
+            <a:ext cx="2078774" cy="646331"/>
           </a:xfrm>
           <a:prstGeom prst="rect">
             <a:avLst/>
@@ -5386,13 +5403,39 @@
           </a:bodyPr>
           <a:lstStyle/>
           <a:p>
-            <a:r>
-              <a:rPr lang="en-US" sz="3600" b="1" dirty="0">
-                <a:solidFill>
-                  <a:schemeClr val="bg1"/>
-                </a:solidFill>
+            <a:pPr marL="0" marR="0" lvl="0" indent="0" algn="l" defTabSz="914400" rtl="0" eaLnBrk="1" fontAlgn="auto" latinLnBrk="0" hangingPunct="1">
+              <a:lnSpc>
+                <a:spcPct val="100000"/>
+              </a:lnSpc>
+              <a:spcBef>
+                <a:spcPts val="0"/>
+              </a:spcBef>
+              <a:spcAft>
+                <a:spcPts val="0"/>
+              </a:spcAft>
+              <a:buClrTx/>
+              <a:buSzTx/>
+              <a:buFontTx/>
+              <a:buNone/>
+              <a:tabLst/>
+              <a:defRPr/>
+            </a:pPr>
+            <a:r>
+              <a:rPr kumimoji="0" lang="en-US" sz="3600" b="1" i="0" u="none" strike="noStrike" kern="1200" cap="none" spc="0" normalizeH="0" baseline="0" noProof="0" dirty="0">
+                <a:ln>
+                  <a:noFill/>
+                </a:ln>
+                <a:solidFill>
+                  <a:prstClr val="white"/>
+                </a:solidFill>
+                <a:effectLst/>
+                <a:uLnTx/>
+                <a:uFillTx/>
+                <a:latin typeface="Aptos" panose="02110004020202020204"/>
+                <a:ea typeface="+mn-ea"/>
+                <a:cs typeface="+mn-cs"/>
               </a:rPr>
-              <a:t>x2 and END</a:t>
+              <a:t>x2 to End</a:t>
             </a:r>
           </a:p>
         </p:txBody>
@@ -5400,7 +5443,7 @@
     </p:spTree>
     <p:extLst>
       <p:ext uri="{BB962C8B-B14F-4D97-AF65-F5344CB8AC3E}">
-        <p14:creationId xmlns:p14="http://schemas.microsoft.com/office/powerpoint/2010/main" val="1511960292"/>
+        <p14:creationId xmlns:p14="http://schemas.microsoft.com/office/powerpoint/2010/main" val="779846196"/>
       </p:ext>
     </p:extLst>
   </p:cSld>
